--- a/skills/deck-build/assets/default-template.pptx
+++ b/skills/deck-build/assets/default-template.pptx
@@ -1159,7 +1159,7 @@
     <p:bodyStyle>
       <a:lvl1pPr algn="l" marL="201168" indent="-201168">
         <a:spcBef>
-          <a:spcPts val="6"/>
+          <a:spcPts val="600"/>
         </a:spcBef>
         <a:buFont typeface="Arial"/>
         <a:buChar char="•"/>
@@ -1174,7 +1174,7 @@
       </a:lvl1pPr>
       <a:lvl2pPr algn="l" marL="411480" indent="-182880">
         <a:spcBef>
-          <a:spcPts val="3"/>
+          <a:spcPts val="300"/>
         </a:spcBef>
         <a:buFont typeface="Arial"/>
         <a:buChar char="–"/>
@@ -1189,7 +1189,7 @@
       </a:lvl2pPr>
       <a:lvl3pPr algn="l" marL="594360" indent="-182880">
         <a:spcBef>
-          <a:spcPts val="3"/>
+          <a:spcPts val="300"/>
         </a:spcBef>
         <a:buFont typeface="Arial"/>
         <a:buChar char="–"/>
@@ -1204,7 +1204,7 @@
       </a:lvl3pPr>
       <a:lvl4pPr algn="l" marL="777240" indent="-182880">
         <a:spcBef>
-          <a:spcPts val="3"/>
+          <a:spcPts val="300"/>
         </a:spcBef>
         <a:buFont typeface="Arial"/>
         <a:buChar char="–"/>
@@ -1219,7 +1219,7 @@
       </a:lvl4pPr>
       <a:lvl5pPr algn="l" marL="960120" indent="-182880">
         <a:spcBef>
-          <a:spcPts val="3"/>
+          <a:spcPts val="300"/>
         </a:spcBef>
         <a:buFont typeface="Arial"/>
         <a:buChar char="–"/>
@@ -1234,7 +1234,7 @@
       </a:lvl5pPr>
       <a:lvl6pPr algn="l" marL="1143000" indent="-182880">
         <a:spcBef>
-          <a:spcPts val="3"/>
+          <a:spcPts val="300"/>
         </a:spcBef>
         <a:buFont typeface="Arial"/>
         <a:buChar char="–"/>
@@ -1249,7 +1249,7 @@
       </a:lvl6pPr>
       <a:lvl7pPr algn="l" marL="1325880" indent="-182880">
         <a:spcBef>
-          <a:spcPts val="3"/>
+          <a:spcPts val="300"/>
         </a:spcBef>
         <a:buFont typeface="Arial"/>
         <a:buChar char="–"/>
@@ -1264,7 +1264,7 @@
       </a:lvl7pPr>
       <a:lvl8pPr algn="l" marL="1508760" indent="-182880">
         <a:spcBef>
-          <a:spcPts val="3"/>
+          <a:spcPts val="300"/>
         </a:spcBef>
         <a:buFont typeface="Arial"/>
         <a:buChar char="–"/>
@@ -1279,7 +1279,7 @@
       </a:lvl8pPr>
       <a:lvl9pPr algn="l" marL="1691640" indent="-182880">
         <a:spcBef>
-          <a:spcPts val="3"/>
+          <a:spcPts val="300"/>
         </a:spcBef>
         <a:buFont typeface="Arial"/>
         <a:buChar char="–"/>
@@ -1393,9 +1393,9 @@
 </file>
 
 <file path=ppt/theme/theme1.xml><?xml version="1.0" encoding="utf-8"?>
-<a:theme xmlns:a="http://schemas.openxmlformats.org/drawingml/2006/main" name="SoWhat">
+<a:theme xmlns:a="http://schemas.openxmlformats.org/drawingml/2006/main" name="SoWhat Decks">
   <a:themeElements>
-    <a:clrScheme name="SoWhat">
+    <a:clrScheme name="SoWhat Decks">
       <a:dk1>
         <a:srgbClr val="1E2329"/>
       </a:dk1>
@@ -1433,7 +1433,7 @@
         <a:srgbClr val="5A6472"/>
       </a:folHlink>
     </a:clrScheme>
-    <a:fontScheme name="SoWhat">
+    <a:fontScheme name="SoWhat Decks">
       <a:majorFont>
         <a:latin typeface="Georgia"/>
         <a:ea typeface=""/>
